--- a/Lunes-15/S02_Lunes-15_1_Carrusel_Visado-en-4h_1x1.pptx
+++ b/Lunes-15/S02_Lunes-15_1_Carrusel_Visado-en-4h_1x1.pptx
@@ -3651,7 +3651,7 @@
                 </a:solidFill>
                 <a:latin typeface="Inter"/>
               </a:rPr>
-              <a:t>Pruébalo ya en early access.</a:t>
+              <a:t>Un abrebocas de lo que viene.</a:t>
             </a:r>
           </a:p>
         </p:txBody>
